--- a/docs/PARITY-final-review.pptx
+++ b/docs/PARITY-final-review.pptx
@@ -125,14 +125,14 @@
   <p:extLst>
     <p:ext uri="{521415D9-36F7-43E2-AB2F-B90AF26B5E84}">
       <p14:sectionLst xmlns:p14="http://schemas.microsoft.com/office/powerpoint/2010/main">
-        <p14:section name="The problem" id="{4a79a6b9-5048-85dc-0d25-90439016a0ae}">
+        <p14:section name="The problem" id="{88cd6086-39d3-86f1-a3db-c6e82eead584}">
           <p14:sldIdLst>
             <p14:sldId id="257"/>
             <p14:sldId id="258"/>
             <p14:sldId id="259"/>
           </p14:sldIdLst>
         </p14:section>
-        <p14:section name="How it works" id="{d90f4d63-a26e-29d3-1d51-6ad39bf08006}">
+        <p14:section name="How it works" id="{4c56b303-19f8-9e1f-263a-bc3e8de3f205}">
           <p14:sldIdLst>
             <p14:sldId id="260"/>
             <p14:sldId id="261"/>
@@ -140,7 +140,7 @@
             <p14:sldId id="263"/>
           </p14:sldIdLst>
         </p14:section>
-        <p14:section name="Results" id="{ecdcc773-3e78-c49a-e1b0-138ab8f141bf}">
+        <p14:section name="Results" id="{96eb1846-603f-e2e4-3238-2ad4297f2120}">
           <p14:sldIdLst>
             <p14:sldId id="264"/>
             <p14:sldId id="265"/>
@@ -150,7 +150,7 @@
             <p14:sldId id="269"/>
           </p14:sldIdLst>
         </p14:section>
-        <p14:section name="The build" id="{838b6a10-724d-58a7-244f-025be0d5bf45}">
+        <p14:section name="The build" id="{e4a33d5a-ea1a-5d34-6911-6539113e21a6}">
           <p14:sldIdLst>
             <p14:sldId id="270"/>
             <p14:sldId id="271"/>
@@ -6839,7 +6839,7 @@
                   <a:srgbClr val="7A7059"/>
                 </a:solidFill>
               </a:rPr>
-              <a:t> completes the objective on every seed   ·   </a:t>
+              <a:t> completes the objective on all 12 seeds tested   ·   </a:t>
             </a:r>
             <a:pPr indent="0" marL="0">
               <a:buNone/>

--- a/docs/PARITY-final-review.pptx
+++ b/docs/PARITY-final-review.pptx
@@ -24,9 +24,10 @@
     <p:sldId id="272" r:id="rId18"/>
     <p:sldId id="273" r:id="rId19"/>
     <p:sldId id="274" r:id="rId20"/>
+    <p:sldId id="275" r:id="rId21"/>
   </p:sldIdLst>
   <p:notesMasterIdLst>
-    <p:notesMasterId r:id="rId21"/>
+    <p:notesMasterId r:id="rId22"/>
   </p:notesMasterIdLst>
   <p:sldSz cx="12192000" cy="6858000"/>
   <p:notesSz cx="6858000" cy="12192000"/>
@@ -125,14 +126,14 @@
   <p:extLst>
     <p:ext uri="{521415D9-36F7-43E2-AB2F-B90AF26B5E84}">
       <p14:sectionLst xmlns:p14="http://schemas.microsoft.com/office/powerpoint/2010/main">
-        <p14:section name="The problem" id="{88cd6086-39d3-86f1-a3db-c6e82eead584}">
+        <p14:section name="The problem" id="{15fa5742-ba9d-d31a-cd8e-a47cca37089a}">
           <p14:sldIdLst>
             <p14:sldId id="257"/>
             <p14:sldId id="258"/>
             <p14:sldId id="259"/>
           </p14:sldIdLst>
         </p14:section>
-        <p14:section name="How it works" id="{4c56b303-19f8-9e1f-263a-bc3e8de3f205}">
+        <p14:section name="How it works" id="{f456e4be-51e9-be30-c6ce-a44fac592dc5}">
           <p14:sldIdLst>
             <p14:sldId id="260"/>
             <p14:sldId id="261"/>
@@ -140,7 +141,7 @@
             <p14:sldId id="263"/>
           </p14:sldIdLst>
         </p14:section>
-        <p14:section name="Results" id="{96eb1846-603f-e2e4-3238-2ad4297f2120}">
+        <p14:section name="Results" id="{d09f2604-0d9b-09c1-1d66-580956584bab}">
           <p14:sldIdLst>
             <p14:sldId id="264"/>
             <p14:sldId id="265"/>
@@ -150,13 +151,14 @@
             <p14:sldId id="269"/>
           </p14:sldIdLst>
         </p14:section>
-        <p14:section name="The build" id="{e4a33d5a-ea1a-5d34-6911-6539113e21a6}">
+        <p14:section name="The build" id="{1f06df63-3dae-de0b-25f0-839aa7e4e5e8}">
           <p14:sldIdLst>
             <p14:sldId id="270"/>
             <p14:sldId id="271"/>
             <p14:sldId id="272"/>
             <p14:sldId id="273"/>
             <p14:sldId id="274"/>
+            <p14:sldId id="275"/>
           </p14:sldIdLst>
         </p14:section>
       </p14:sectionLst>
@@ -1355,7 +1357,7 @@
           <a:p>
             <a:r>
               <a:rPr lang="en-US" dirty="0"/>
-              <a:t>Say all four out loud. A panel that hears you name your own limits stops hunting for them.</a:t>
+              <a:t>Panels mark attribution. Name which half is yours in one sentence and move on — do not read the lists aloud.</a:t>
             </a:r>
             <a:endParaRPr lang="en-US" dirty="0"/>
           </a:p>
@@ -1443,7 +1445,7 @@
           <a:p>
             <a:r>
               <a:rPr lang="en-US" dirty="0"/>
-              <a:t>Close on the second-to-last line. The project set out to make a predictive AI the player can feel, and the measurement that it works is the deliverable.</a:t>
+              <a:t>Say all four out loud. A panel that hears you name your own limits stops hunting for them.</a:t>
             </a:r>
             <a:endParaRPr lang="en-US" dirty="0"/>
           </a:p>
@@ -1555,6 +1557,94 @@
             <a:fld id="{F7021451-1387-4CA6-816F-3879F97B5CBC}" type="slidenum">
               <a:rPr lang="en-US"/>
               <a:t>2</a:t>
+            </a:fld>
+            <a:endParaRPr lang="en-US"/>
+          </a:p>
+        </p:txBody>
+      </p:sp>
+    </p:spTree>
+    <p:extLst>
+      <p:ext uri="{BB962C8B-B14F-4D97-AF65-F5344CB8AC3E}">
+        <p14:creationId xmlns:p14="http://schemas.microsoft.com/office/powerpoint/2010/main" val="1024086991"/>
+      </p:ext>
+    </p:extLst>
+  </p:cSld>
+  <p:clrMapOvr>
+    <a:masterClrMapping/>
+  </p:clrMapOvr>
+</p:notes>
+</file>
+
+<file path=ppt/notesSlides/notesSlide20.xml><?xml version="1.0" encoding="utf-8"?>
+<p:notes xmlns:a="http://schemas.openxmlformats.org/drawingml/2006/main" xmlns:r="http://schemas.openxmlformats.org/officeDocument/2006/relationships" xmlns:p="http://schemas.openxmlformats.org/presentationml/2006/main">
+  <p:cSld>
+    <p:spTree>
+      <p:nvGrpSpPr>
+        <p:cNvPr id="1" name=""/>
+        <p:cNvGrpSpPr/>
+        <p:nvPr/>
+      </p:nvGrpSpPr>
+      <p:grpSpPr>
+        <a:xfrm>
+          <a:off x="0" y="0"/>
+          <a:ext cx="0" cy="0"/>
+          <a:chOff x="0" y="0"/>
+          <a:chExt cx="0" cy="0"/>
+        </a:xfrm>
+      </p:grpSpPr>
+      <p:sp>
+        <p:nvSpPr>
+          <p:cNvPr id="2" name="Slide Image Placeholder 1"/>
+          <p:cNvSpPr>
+            <a:spLocks noGrp="1" noRot="1" noChangeAspect="1"/>
+          </p:cNvSpPr>
+          <p:nvPr>
+            <p:ph type="sldImg"/>
+          </p:nvPr>
+        </p:nvSpPr>
+        <p:spPr/>
+      </p:sp>
+      <p:sp>
+        <p:nvSpPr>
+          <p:cNvPr id="3" name="Notes Placeholder 2"/>
+          <p:cNvSpPr>
+            <a:spLocks noGrp="1"/>
+          </p:cNvSpPr>
+          <p:nvPr>
+            <p:ph type="body" idx="1"/>
+          </p:nvPr>
+        </p:nvSpPr>
+        <p:spPr/>
+        <p:txBody>
+          <a:bodyPr/>
+          <a:lstStyle/>
+          <a:p>
+            <a:r>
+              <a:rPr lang="en-US" dirty="0"/>
+              <a:t>Close on the second-to-last line. The project set out to make a predictive AI the player can feel, and the measurement that it works is the deliverable.</a:t>
+            </a:r>
+            <a:endParaRPr lang="en-US" dirty="0"/>
+          </a:p>
+        </p:txBody>
+      </p:sp>
+      <p:sp>
+        <p:nvSpPr>
+          <p:cNvPr id="4" name="Slide Number Placeholder 3"/>
+          <p:cNvSpPr>
+            <a:spLocks noGrp="1"/>
+          </p:cNvSpPr>
+          <p:nvPr>
+            <p:ph type="sldNum" sz="quarter" idx="10"/>
+          </p:nvPr>
+        </p:nvSpPr>
+        <p:spPr/>
+        <p:txBody>
+          <a:bodyPr/>
+          <a:lstStyle/>
+          <a:p>
+            <a:fld id="{F7021451-1387-4CA6-816F-3879F97B5CBC}" type="slidenum">
+              <a:rPr lang="en-US"/>
+              <a:t>20</a:t>
             </a:fld>
             <a:endParaRPr lang="en-US"/>
           </a:p>
@@ -3575,7 +3665,7 @@
                   <a:srgbClr val="FBF9F4"/>
                 </a:solidFill>
               </a:rPr>
-              <a:t>Shivam Kumar Arya  ·  Parth Jaiswal</a:t>
+              <a:t>Shivam Kumar Arya (23BRS1357)  ·  Parth Jaiswal (23BRS1323)</a:t>
             </a:r>
             <a:endParaRPr lang="en-US" sz="1250" dirty="0"/>
           </a:p>
@@ -3592,7 +3682,7 @@
                   <a:srgbClr val="7A7059"/>
                 </a:solidFill>
               </a:rPr>
-              <a:t>B.Tech Computer Science and Engineering (AI &amp; Robotics)  ·  BCSE497J</a:t>
+              <a:t>Team 53  ·  Guide: Prakash B  ·  Panel 88  ·  BCSE497J</a:t>
             </a:r>
             <a:endParaRPr lang="en-US" sz="1250" dirty="0"/>
           </a:p>
@@ -3609,7 +3699,7 @@
                   <a:srgbClr val="7A7059"/>
                 </a:solidFill>
               </a:rPr>
-              <a:t>Vellore Institute of Technology</a:t>
+              <a:t>B.Tech Computer Science and Engineering (AI &amp; Robotics)  ·  Vellore Institute of Technology</a:t>
             </a:r>
             <a:endParaRPr lang="en-US" sz="1250" dirty="0"/>
           </a:p>
@@ -6957,7 +7047,7 @@
                 <a:ea typeface="Cambria" pitchFamily="34" charset="-122"/>
                 <a:cs typeface="Cambria" pitchFamily="34" charset="-120"/>
               </a:rPr>
-              <a:t>What this work does not establish</a:t>
+              <a:t>Who did what</a:t>
             </a:r>
             <a:endParaRPr lang="en-US" sz="3200" dirty="0"/>
           </a:p>
@@ -6998,7 +7088,7 @@
                   <a:srgbClr val="7A7059"/>
                 </a:solidFill>
               </a:rPr>
-              <a:t>Stated plainly, because the limits are a result too.</a:t>
+              <a:t>The project guidelines ask the candidate to distinguish what was added from what was already there. This mirrors Table 1.4 of the report.</a:t>
             </a:r>
             <a:endParaRPr lang="en-US" sz="1500" dirty="0"/>
           </a:p>
@@ -7012,12 +7102,12 @@
         </p:nvSpPr>
         <p:spPr>
           <a:xfrm>
-            <a:off x="585216" y="1874520"/>
-            <a:ext cx="5303520" cy="1783080"/>
+            <a:off x="585216" y="1810512"/>
+            <a:ext cx="5303520" cy="3886200"/>
           </a:xfrm>
           <a:prstGeom prst="roundRect">
             <a:avLst>
-              <a:gd name="adj" fmla="val 2051"/>
+              <a:gd name="adj" fmla="val 941"/>
             </a:avLst>
           </a:prstGeom>
           <a:solidFill>
@@ -7039,7 +7129,7 @@
         </p:nvSpPr>
         <p:spPr>
           <a:xfrm>
-            <a:off x="859536" y="2075688"/>
+            <a:off x="859536" y="2011680"/>
             <a:ext cx="4754880" cy="329184"/>
           </a:xfrm>
           <a:prstGeom prst="rect">
@@ -7058,10 +7148,10 @@
             <a:r>
               <a:rPr lang="en-US" sz="1500" b="1" dirty="0">
                 <a:solidFill>
-                  <a:srgbClr val="C2402F"/>
-                </a:solidFill>
-              </a:rPr>
-              <a:t>Nobody has played it</a:t>
+                  <a:srgbClr val="2A78D6"/>
+                </a:solidFill>
+              </a:rPr>
+              <a:t>Baseline — Shivam Kumar Arya</a:t>
             </a:r>
             <a:endParaRPr lang="en-US" sz="1500" dirty="0"/>
           </a:p>
@@ -7075,8 +7165,8 @@
         </p:nvSpPr>
         <p:spPr>
           <a:xfrm>
-            <a:off x="859536" y="2441448"/>
-            <a:ext cx="4800600" cy="1051560"/>
+            <a:off x="859536" y="2450592"/>
+            <a:ext cx="4800600" cy="3017520"/>
           </a:xfrm>
           <a:prstGeom prst="rect">
             <a:avLst/>
@@ -7088,21 +7178,109 @@
           <a:bodyPr wrap="square" lIns="0" tIns="0" rIns="0" bIns="0" rtlCol="0" anchor="ctr"/>
           <a:lstStyle/>
           <a:p>
-            <a:pPr indent="0" marL="0">
+            <a:pPr marL="342900" indent="-342900">
               <a:lnSpc>
-                <a:spcPts val="1800"/>
+                <a:spcPts val="1600"/>
               </a:lnSpc>
-              <a:buNone/>
-            </a:pPr>
-            <a:r>
-              <a:rPr lang="en-US" sz="1250" dirty="0">
+              <a:spcAft>
+                <a:spcPts val="700"/>
+              </a:spcAft>
+              <a:buSzPct val="100000"/>
+              <a:buChar char="•"/>
+            </a:pPr>
+            <a:r>
+              <a:rPr lang="en-US" sz="1200" dirty="0">
                 <a:solidFill>
                   <a:srgbClr val="0B0A08"/>
                 </a:solidFill>
               </a:rPr>
-              <a:t>Every behavioural parameter — the deviation rate, the writing model — is an assumption. Claims about fear, difficulty and enjoyment are untested.</a:t>
-            </a:r>
-            <a:endParaRPr lang="en-US" sz="1250" dirty="0"/>
+              <a:t>Variable-order predictor, order-1 and uniform baselines</a:t>
+            </a:r>
+            <a:endParaRPr lang="en-US" sz="1200" dirty="0"/>
+          </a:p>
+          <a:p>
+            <a:pPr marL="342900" indent="-342900">
+              <a:lnSpc>
+                <a:spcPts val="1600"/>
+              </a:lnSpc>
+              <a:spcAft>
+                <a:spcPts val="700"/>
+              </a:spcAft>
+              <a:buSzPct val="100000"/>
+              <a:buChar char="•"/>
+            </a:pPr>
+            <a:r>
+              <a:rPr lang="en-US" sz="1200" dirty="0">
+                <a:solidFill>
+                  <a:srgbClr val="0B0A08"/>
+                </a:solidFill>
+              </a:rPr>
+              <a:t>Door sensors and the forward belief filter</a:t>
+            </a:r>
+            <a:endParaRPr lang="en-US" sz="1200" dirty="0"/>
+          </a:p>
+          <a:p>
+            <a:pPr marL="342900" indent="-342900">
+              <a:lnSpc>
+                <a:spcPts val="1600"/>
+              </a:lnSpc>
+              <a:spcAft>
+                <a:spcPts val="700"/>
+              </a:spcAft>
+              <a:buSzPct val="100000"/>
+              <a:buChar char="•"/>
+            </a:pPr>
+            <a:r>
+              <a:rPr lang="en-US" sz="1200" dirty="0">
+                <a:solidFill>
+                  <a:srgbClr val="0B0A08"/>
+                </a:solidFill>
+              </a:rPr>
+              <a:t>Director, counter-moves and the fairness rules</a:t>
+            </a:r>
+            <a:endParaRPr lang="en-US" sz="1200" dirty="0"/>
+          </a:p>
+          <a:p>
+            <a:pPr marL="342900" indent="-342900">
+              <a:lnSpc>
+                <a:spcPts val="1600"/>
+              </a:lnSpc>
+              <a:spcAft>
+                <a:spcPts val="700"/>
+              </a:spcAft>
+              <a:buSzPct val="100000"/>
+              <a:buChar char="•"/>
+            </a:pPr>
+            <a:r>
+              <a:rPr lang="en-US" sz="1200" dirty="0">
+                <a:solidFill>
+                  <a:srgbClr val="0B0A08"/>
+                </a:solidFill>
+              </a:rPr>
+              <a:t>Facility graph, scripted players, evaluation, invariant tests</a:t>
+            </a:r>
+            <a:endParaRPr lang="en-US" sz="1200" dirty="0"/>
+          </a:p>
+          <a:p>
+            <a:pPr marL="342900" indent="-342900">
+              <a:lnSpc>
+                <a:spcPts val="1600"/>
+              </a:lnSpc>
+              <a:spcAft>
+                <a:spcPts val="700"/>
+              </a:spcAft>
+              <a:buSzPct val="100000"/>
+              <a:buChar char="•"/>
+            </a:pPr>
+            <a:r>
+              <a:rPr lang="en-US" sz="1200" dirty="0">
+                <a:solidFill>
+                  <a:srgbClr val="0B0A08"/>
+                </a:solidFill>
+              </a:rPr>
+              <a:t>Door clock, notebook, register, codebooks, hunting, audio, step mode</a:t>
+            </a:r>
+            <a:endParaRPr lang="en-US" sz="1200" dirty="0"/>
           </a:p>
         </p:txBody>
       </p:sp>
@@ -7114,12 +7292,12 @@
         </p:nvSpPr>
         <p:spPr>
           <a:xfrm>
-            <a:off x="6163056" y="1874520"/>
-            <a:ext cx="5303520" cy="1783080"/>
+            <a:off x="6163056" y="1810512"/>
+            <a:ext cx="5303520" cy="3886200"/>
           </a:xfrm>
           <a:prstGeom prst="roundRect">
             <a:avLst>
-              <a:gd name="adj" fmla="val 2051"/>
+              <a:gd name="adj" fmla="val 941"/>
             </a:avLst>
           </a:prstGeom>
           <a:solidFill>
@@ -7141,7 +7319,7 @@
         </p:nvSpPr>
         <p:spPr>
           <a:xfrm>
-            <a:off x="6437376" y="2075688"/>
+            <a:off x="6437376" y="2011680"/>
             <a:ext cx="4754880" cy="329184"/>
           </a:xfrm>
           <a:prstGeom prst="rect">
@@ -7160,10 +7338,10 @@
             <a:r>
               <a:rPr lang="en-US" sz="1500" b="1" dirty="0">
                 <a:solidFill>
-                  <a:srgbClr val="C2402F"/>
-                </a:solidFill>
-              </a:rPr>
-              <a:t>The players are scripted</a:t>
+                  <a:srgbClr val="B2561F"/>
+                </a:solidFill>
+              </a:rPr>
+              <a:t>This work — Parth Jaiswal</a:t>
             </a:r>
             <a:endParaRPr lang="en-US" sz="1500" dirty="0"/>
           </a:p>
@@ -7177,8 +7355,8 @@
         </p:nvSpPr>
         <p:spPr>
           <a:xfrm>
-            <a:off x="6437376" y="2441448"/>
-            <a:ext cx="4800600" cy="1051560"/>
+            <a:off x="6437376" y="2450592"/>
+            <a:ext cx="4800600" cy="3017520"/>
           </a:xfrm>
           <a:prstGeom prst="rect">
             <a:avLst/>
@@ -7190,61 +7368,143 @@
           <a:bodyPr wrap="square" lIns="0" tIns="0" rIns="0" bIns="0" rtlCol="0" anchor="ctr"/>
           <a:lstStyle/>
           <a:p>
-            <a:pPr indent="0" marL="0">
+            <a:pPr marL="342900" indent="-342900">
               <a:lnSpc>
-                <a:spcPts val="1800"/>
+                <a:spcPts val="1600"/>
               </a:lnSpc>
-              <a:buNone/>
-            </a:pPr>
-            <a:r>
-              <a:rPr lang="en-US" sz="1250" dirty="0">
+              <a:spcAft>
+                <a:spcPts val="700"/>
+              </a:spcAft>
+              <a:buSzPct val="100000"/>
+              <a:buChar char="•"/>
+            </a:pPr>
+            <a:r>
+              <a:rPr lang="en-US" sz="1200" dirty="0">
                 <a:solidFill>
                   <a:srgbClr val="0B0A08"/>
                 </a:solidFill>
               </a:rPr>
-              <a:t>A Markov model predicting a scripted agent is a weaker claim than one predicting a person. Human traces are the single highest-value next step.</a:t>
-            </a:r>
-            <a:endParaRPr lang="en-US" sz="1250" dirty="0"/>
-          </a:p>
-        </p:txBody>
-      </p:sp>
-      <p:sp>
-        <p:nvSpPr>
-          <p:cNvPr id="10" name="Shape 8"/>
-          <p:cNvSpPr/>
-          <p:nvPr/>
-        </p:nvSpPr>
-        <p:spPr>
-          <a:xfrm>
-            <a:off x="585216" y="3886200"/>
-            <a:ext cx="5303520" cy="1783080"/>
-          </a:xfrm>
-          <a:prstGeom prst="roundRect">
-            <a:avLst>
-              <a:gd name="adj" fmla="val 2051"/>
-            </a:avLst>
-          </a:prstGeom>
-          <a:solidFill>
-            <a:srgbClr val="FFFFFF"/>
-          </a:solidFill>
-          <a:ln w="9525">
-            <a:solidFill>
-              <a:srgbClr val="DED7C6"/>
-            </a:solidFill>
-            <a:prstDash val="solid"/>
-          </a:ln>
-        </p:spPr>
-      </p:sp>
-      <p:sp>
-        <p:nvSpPr>
-          <p:cNvPr id="11" name="Text 9"/>
+              <a:t>A new facility every run: seeded doors, roles, codes, keywords</a:t>
+            </a:r>
+            <a:endParaRPr lang="en-US" sz="1200" dirty="0"/>
+          </a:p>
+          <a:p>
+            <a:pPr marL="342900" indent="-342900">
+              <a:lnSpc>
+                <a:spcPts val="1600"/>
+              </a:lnSpc>
+              <a:spcAft>
+                <a:spcPts val="700"/>
+              </a:spcAft>
+              <a:buSzPct val="100000"/>
+              <a:buChar char="•"/>
+            </a:pPr>
+            <a:r>
+              <a:rPr lang="en-US" sz="1200" dirty="0">
+                <a:solidFill>
+                  <a:srgbClr val="0B0A08"/>
+                </a:solidFill>
+              </a:rPr>
+              <a:t>The MIMIC antagonist and its row-tearing</a:t>
+            </a:r>
+            <a:endParaRPr lang="en-US" sz="1200" dirty="0"/>
+          </a:p>
+          <a:p>
+            <a:pPr marL="342900" indent="-342900">
+              <a:lnSpc>
+                <a:spcPts val="1600"/>
+              </a:lnSpc>
+              <a:spcAft>
+                <a:spcPts val="700"/>
+              </a:spcAft>
+              <a:buSzPct val="100000"/>
+              <a:buChar char="•"/>
+            </a:pPr>
+            <a:r>
+              <a:rPr lang="en-US" sz="1200" dirty="0">
+                <a:solidFill>
+                  <a:srgbClr val="0B0A08"/>
+                </a:solidFill>
+              </a:rPr>
+              <a:t>Mouse look without pointer capture</a:t>
+            </a:r>
+            <a:endParaRPr lang="en-US" sz="1200" dirty="0"/>
+          </a:p>
+          <a:p>
+            <a:pPr marL="342900" indent="-342900">
+              <a:lnSpc>
+                <a:spcPts val="1600"/>
+              </a:lnSpc>
+              <a:spcAft>
+                <a:spcPts val="700"/>
+              </a:spcAft>
+              <a:buSzPct val="100000"/>
+              <a:buChar char="•"/>
+            </a:pPr>
+            <a:r>
+              <a:rPr lang="en-US" sz="1200" dirty="0">
+                <a:solidFill>
+                  <a:srgbClr val="0B0A08"/>
+                </a:solidFill>
+              </a:rPr>
+              <a:t>Material system, weathered surfaces, emergency lighting, grain</a:t>
+            </a:r>
+            <a:endParaRPr lang="en-US" sz="1200" dirty="0"/>
+          </a:p>
+          <a:p>
+            <a:pPr marL="342900" indent="-342900">
+              <a:lnSpc>
+                <a:spcPts val="1600"/>
+              </a:lnSpc>
+              <a:spcAft>
+                <a:spcPts val="700"/>
+              </a:spcAft>
+              <a:buSzPct val="100000"/>
+              <a:buChar char="•"/>
+            </a:pPr>
+            <a:r>
+              <a:rPr lang="en-US" sz="1200" dirty="0">
+                <a:solidFill>
+                  <a:srgbClr val="0B0A08"/>
+                </a:solidFill>
+              </a:rPr>
+              <a:t>Props, the live uplink screen and the codebook monitor</a:t>
+            </a:r>
+            <a:endParaRPr lang="en-US" sz="1200" dirty="0"/>
+          </a:p>
+          <a:p>
+            <a:pPr marL="342900" indent="-342900">
+              <a:lnSpc>
+                <a:spcPts val="1600"/>
+              </a:lnSpc>
+              <a:spcAft>
+                <a:spcPts val="700"/>
+              </a:spcAft>
+              <a:buSzPct val="100000"/>
+              <a:buChar char="•"/>
+            </a:pPr>
+            <a:r>
+              <a:rPr lang="en-US" sz="1200" dirty="0">
+                <a:solidFill>
+                  <a:srgbClr val="0B0A08"/>
+                </a:solidFill>
+              </a:rPr>
+              <a:t>Watch mode, recording mode and the recorder</a:t>
+            </a:r>
+            <a:endParaRPr lang="en-US" sz="1200" dirty="0"/>
+          </a:p>
+        </p:txBody>
+      </p:sp>
+      <p:sp>
+        <p:nvSpPr>
+          <p:cNvPr id="10" name="Text 8"/>
           <p:cNvSpPr txBox="1"/>
           <p:nvPr/>
         </p:nvSpPr>
         <p:spPr>
           <a:xfrm>
-            <a:off x="859536" y="4087368"/>
-            <a:ext cx="4754880" cy="329184"/>
+            <a:off x="585216" y="5797296"/>
+            <a:ext cx="10936224" cy="320040"/>
           </a:xfrm>
           <a:prstGeom prst="rect">
             <a:avLst/>
@@ -7260,161 +7520,20 @@
               <a:buNone/>
             </a:pPr>
             <a:r>
-              <a:rPr lang="en-US" sz="1500" b="1" dirty="0">
-                <a:solidFill>
-                  <a:srgbClr val="C2402F"/>
-                </a:solidFill>
-              </a:rPr>
-              <a:t>Memory does not transfer</a:t>
-            </a:r>
-            <a:endParaRPr lang="en-US" sz="1500" dirty="0"/>
-          </a:p>
-        </p:txBody>
-      </p:sp>
-      <p:sp>
-        <p:nvSpPr>
-          <p:cNvPr id="12" name="Text 10"/>
-          <p:cNvSpPr txBox="1"/>
-          <p:nvPr/>
-        </p:nvSpPr>
-        <p:spPr>
-          <a:xfrm>
-            <a:off x="859536" y="4453128"/>
-            <a:ext cx="4800600" cy="1051560"/>
-          </a:xfrm>
-          <a:prstGeom prst="rect">
-            <a:avLst/>
-          </a:prstGeom>
-          <a:noFill/>
-          <a:ln/>
-        </p:spPr>
-        <p:txBody>
-          <a:bodyPr wrap="square" lIns="0" tIns="0" rIns="0" bIns="0" rtlCol="0" anchor="ctr"/>
-          <a:lstStyle/>
-          <a:p>
-            <a:pPr indent="0" marL="0">
-              <a:lnSpc>
-                <a:spcPts val="1800"/>
-              </a:lnSpc>
-              <a:buNone/>
-            </a:pPr>
-            <a:r>
-              <a:rPr lang="en-US" sz="1250" dirty="0">
-                <a:solidFill>
-                  <a:srgbClr val="0B0A08"/>
-                </a:solidFill>
-              </a:rPr>
-              <a:t>Retained learning helps in a fixed building and hurts in a regenerated one. The predictor is keyed on room indices, and an index stops meaning the same thing.</a:t>
-            </a:r>
-            <a:endParaRPr lang="en-US" sz="1250" dirty="0"/>
-          </a:p>
-        </p:txBody>
-      </p:sp>
-      <p:sp>
-        <p:nvSpPr>
-          <p:cNvPr id="13" name="Shape 11"/>
-          <p:cNvSpPr/>
-          <p:nvPr/>
-        </p:nvSpPr>
-        <p:spPr>
-          <a:xfrm>
-            <a:off x="6163056" y="3886200"/>
-            <a:ext cx="5303520" cy="1783080"/>
-          </a:xfrm>
-          <a:prstGeom prst="roundRect">
-            <a:avLst>
-              <a:gd name="adj" fmla="val 2051"/>
-            </a:avLst>
-          </a:prstGeom>
-          <a:solidFill>
-            <a:srgbClr val="FFFFFF"/>
-          </a:solidFill>
-          <a:ln w="9525">
-            <a:solidFill>
-              <a:srgbClr val="DED7C6"/>
-            </a:solidFill>
-            <a:prstDash val="solid"/>
-          </a:ln>
-        </p:spPr>
-      </p:sp>
-      <p:sp>
-        <p:nvSpPr>
-          <p:cNvPr id="14" name="Text 12"/>
-          <p:cNvSpPr txBox="1"/>
-          <p:nvPr/>
-        </p:nvSpPr>
-        <p:spPr>
-          <a:xfrm>
-            <a:off x="6437376" y="4087368"/>
-            <a:ext cx="4754880" cy="329184"/>
-          </a:xfrm>
-          <a:prstGeom prst="rect">
-            <a:avLst/>
-          </a:prstGeom>
-          <a:noFill/>
-          <a:ln/>
-        </p:spPr>
-        <p:txBody>
-          <a:bodyPr wrap="square" lIns="0" tIns="0" rIns="0" bIns="0" rtlCol="0" anchor="ctr"/>
-          <a:lstStyle/>
-          <a:p>
-            <a:pPr indent="0" marL="0">
-              <a:buNone/>
-            </a:pPr>
-            <a:r>
-              <a:rPr lang="en-US" sz="1500" b="1" dirty="0">
-                <a:solidFill>
-                  <a:srgbClr val="C2402F"/>
-                </a:solidFill>
-              </a:rPr>
-              <a:t>Dwell is unsolved</a:t>
-            </a:r>
-            <a:endParaRPr lang="en-US" sz="1500" dirty="0"/>
-          </a:p>
-        </p:txBody>
-      </p:sp>
-      <p:sp>
-        <p:nvSpPr>
-          <p:cNvPr id="15" name="Text 13"/>
-          <p:cNvSpPr txBox="1"/>
-          <p:nvPr/>
-        </p:nvSpPr>
-        <p:spPr>
-          <a:xfrm>
-            <a:off x="6437376" y="4453128"/>
-            <a:ext cx="4800600" cy="1051560"/>
-          </a:xfrm>
-          <a:prstGeom prst="rect">
-            <a:avLst/>
-          </a:prstGeom>
-          <a:noFill/>
-          <a:ln/>
-        </p:spPr>
-        <p:txBody>
-          <a:bodyPr wrap="square" lIns="0" tIns="0" rIns="0" bIns="0" rtlCol="0" anchor="ctr"/>
-          <a:lstStyle/>
-          <a:p>
-            <a:pPr indent="0" marL="0">
-              <a:lnSpc>
-                <a:spcPts val="1800"/>
-              </a:lnSpc>
-              <a:buNone/>
-            </a:pPr>
-            <a:r>
-              <a:rPr lang="en-US" sz="1250" dirty="0">
-                <a:solidFill>
-                  <a:srgbClr val="0B0A08"/>
-                </a:solidFill>
-              </a:rPr>
-              <a:t>16.8% recall on the moment the player stops to write, after four failed attempts to improve it.</a:t>
-            </a:r>
-            <a:endParaRPr lang="en-US" sz="1250" dirty="0"/>
-          </a:p>
-        </p:txBody>
-      </p:sp>
-      <p:sp>
-        <p:nvSpPr>
-          <p:cNvPr id="17" name="Text 1"/>
+              <a:rPr lang="en-US" sz="1150" i="1" dirty="0">
+                <a:solidFill>
+                  <a:srgbClr val="7A7059"/>
+                </a:solidFill>
+              </a:rPr>
+              <a:t>E13, the cross-session measurement in §7.8, was added to the baseline evaluation suite after the fork.</a:t>
+            </a:r>
+            <a:endParaRPr lang="en-US" sz="1150" dirty="0"/>
+          </a:p>
+        </p:txBody>
+      </p:sp>
+      <p:sp>
+        <p:nvSpPr>
+          <p:cNvPr id="12" name="Text 1"/>
           <p:cNvSpPr/>
           <p:nvPr>
             <p:ph idx="103" hasCustomPrompt="1"/>
@@ -7477,34 +7596,34 @@
         </p:nvSpPr>
         <p:spPr>
           <a:xfrm>
-            <a:off x="822960" y="1371600"/>
-            <a:ext cx="10515600" cy="914400"/>
-          </a:xfrm>
-          <a:prstGeom prst="rect">
-            <a:avLst/>
-          </a:prstGeom>
-          <a:noFill/>
-          <a:ln/>
-        </p:spPr>
-        <p:txBody>
-          <a:bodyPr wrap="square" rtlCol="0"/>
+            <a:off x="566928" y="384048"/>
+            <a:ext cx="11064240" cy="713232"/>
+          </a:xfrm>
+          <a:prstGeom prst="rect">
+            <a:avLst/>
+          </a:prstGeom>
+          <a:noFill/>
+          <a:ln/>
+        </p:spPr>
+        <p:txBody>
+          <a:bodyPr wrap="square" lIns="0" tIns="0" rIns="0" bIns="0" rtlCol="0"/>
           <a:lstStyle/>
           <a:p>
             <a:pPr algn="l" indent="0" marL="0">
               <a:buNone/>
             </a:pPr>
             <a:r>
-              <a:rPr lang="en-US" sz="3800" b="1" dirty="0">
-                <a:solidFill>
-                  <a:srgbClr val="FFB545"/>
+              <a:rPr lang="en-US" sz="3200" b="1" dirty="0">
+                <a:solidFill>
+                  <a:srgbClr val="0B0A08"/>
                 </a:solidFill>
                 <a:latin typeface="Cambria" pitchFamily="34" charset="0"/>
                 <a:ea typeface="Cambria" pitchFamily="34" charset="-122"/>
                 <a:cs typeface="Cambria" pitchFamily="34" charset="-120"/>
               </a:rPr>
-              <a:t>Where it stands</a:t>
-            </a:r>
-            <a:endParaRPr lang="en-US" sz="3800" dirty="0"/>
+              <a:t>What this work does not establish</a:t>
+            </a:r>
+            <a:endParaRPr lang="en-US" sz="3200" dirty="0"/>
           </a:p>
         </p:txBody>
       </p:sp>
@@ -7518,8 +7637,457 @@
         </p:nvSpPr>
         <p:spPr>
           <a:xfrm>
-            <a:off x="868680" y="2212848"/>
-            <a:ext cx="10332720" cy="3611880"/>
+            <a:off x="585216" y="1115568"/>
+            <a:ext cx="10972800" cy="566928"/>
+          </a:xfrm>
+          <a:prstGeom prst="rect">
+            <a:avLst/>
+          </a:prstGeom>
+          <a:noFill/>
+          <a:ln/>
+        </p:spPr>
+        <p:txBody>
+          <a:bodyPr wrap="square" lIns="0" tIns="0" rIns="0" bIns="0" rtlCol="0"/>
+          <a:lstStyle/>
+          <a:p>
+            <a:pPr indent="0" marL="0">
+              <a:lnSpc>
+                <a:spcPts val="2200"/>
+              </a:lnSpc>
+              <a:buNone/>
+            </a:pPr>
+            <a:r>
+              <a:rPr lang="en-US" sz="1500" dirty="0">
+                <a:solidFill>
+                  <a:srgbClr val="7A7059"/>
+                </a:solidFill>
+              </a:rPr>
+              <a:t>Stated plainly, because the limits are a result too.</a:t>
+            </a:r>
+            <a:endParaRPr lang="en-US" sz="1500" dirty="0"/>
+          </a:p>
+        </p:txBody>
+      </p:sp>
+      <p:sp>
+        <p:nvSpPr>
+          <p:cNvPr id="4" name="Shape 2"/>
+          <p:cNvSpPr/>
+          <p:nvPr/>
+        </p:nvSpPr>
+        <p:spPr>
+          <a:xfrm>
+            <a:off x="585216" y="1874520"/>
+            <a:ext cx="5303520" cy="1783080"/>
+          </a:xfrm>
+          <a:prstGeom prst="roundRect">
+            <a:avLst>
+              <a:gd name="adj" fmla="val 2051"/>
+            </a:avLst>
+          </a:prstGeom>
+          <a:solidFill>
+            <a:srgbClr val="FFFFFF"/>
+          </a:solidFill>
+          <a:ln w="9525">
+            <a:solidFill>
+              <a:srgbClr val="DED7C6"/>
+            </a:solidFill>
+            <a:prstDash val="solid"/>
+          </a:ln>
+        </p:spPr>
+      </p:sp>
+      <p:sp>
+        <p:nvSpPr>
+          <p:cNvPr id="5" name="Text 3"/>
+          <p:cNvSpPr txBox="1"/>
+          <p:nvPr/>
+        </p:nvSpPr>
+        <p:spPr>
+          <a:xfrm>
+            <a:off x="859536" y="2075688"/>
+            <a:ext cx="4754880" cy="329184"/>
+          </a:xfrm>
+          <a:prstGeom prst="rect">
+            <a:avLst/>
+          </a:prstGeom>
+          <a:noFill/>
+          <a:ln/>
+        </p:spPr>
+        <p:txBody>
+          <a:bodyPr wrap="square" lIns="0" tIns="0" rIns="0" bIns="0" rtlCol="0" anchor="ctr"/>
+          <a:lstStyle/>
+          <a:p>
+            <a:pPr indent="0" marL="0">
+              <a:buNone/>
+            </a:pPr>
+            <a:r>
+              <a:rPr lang="en-US" sz="1500" b="1" dirty="0">
+                <a:solidFill>
+                  <a:srgbClr val="C2402F"/>
+                </a:solidFill>
+              </a:rPr>
+              <a:t>Nobody has played it</a:t>
+            </a:r>
+            <a:endParaRPr lang="en-US" sz="1500" dirty="0"/>
+          </a:p>
+        </p:txBody>
+      </p:sp>
+      <p:sp>
+        <p:nvSpPr>
+          <p:cNvPr id="6" name="Text 4"/>
+          <p:cNvSpPr txBox="1"/>
+          <p:nvPr/>
+        </p:nvSpPr>
+        <p:spPr>
+          <a:xfrm>
+            <a:off x="859536" y="2441448"/>
+            <a:ext cx="4800600" cy="1051560"/>
+          </a:xfrm>
+          <a:prstGeom prst="rect">
+            <a:avLst/>
+          </a:prstGeom>
+          <a:noFill/>
+          <a:ln/>
+        </p:spPr>
+        <p:txBody>
+          <a:bodyPr wrap="square" lIns="0" tIns="0" rIns="0" bIns="0" rtlCol="0" anchor="ctr"/>
+          <a:lstStyle/>
+          <a:p>
+            <a:pPr indent="0" marL="0">
+              <a:lnSpc>
+                <a:spcPts val="1800"/>
+              </a:lnSpc>
+              <a:buNone/>
+            </a:pPr>
+            <a:r>
+              <a:rPr lang="en-US" sz="1250" dirty="0">
+                <a:solidFill>
+                  <a:srgbClr val="0B0A08"/>
+                </a:solidFill>
+              </a:rPr>
+              <a:t>Every behavioural parameter — the deviation rate, the writing model — is an assumption. Claims about fear, difficulty and enjoyment are untested.</a:t>
+            </a:r>
+            <a:endParaRPr lang="en-US" sz="1250" dirty="0"/>
+          </a:p>
+        </p:txBody>
+      </p:sp>
+      <p:sp>
+        <p:nvSpPr>
+          <p:cNvPr id="7" name="Shape 5"/>
+          <p:cNvSpPr/>
+          <p:nvPr/>
+        </p:nvSpPr>
+        <p:spPr>
+          <a:xfrm>
+            <a:off x="6163056" y="1874520"/>
+            <a:ext cx="5303520" cy="1783080"/>
+          </a:xfrm>
+          <a:prstGeom prst="roundRect">
+            <a:avLst>
+              <a:gd name="adj" fmla="val 2051"/>
+            </a:avLst>
+          </a:prstGeom>
+          <a:solidFill>
+            <a:srgbClr val="FFFFFF"/>
+          </a:solidFill>
+          <a:ln w="9525">
+            <a:solidFill>
+              <a:srgbClr val="DED7C6"/>
+            </a:solidFill>
+            <a:prstDash val="solid"/>
+          </a:ln>
+        </p:spPr>
+      </p:sp>
+      <p:sp>
+        <p:nvSpPr>
+          <p:cNvPr id="8" name="Text 6"/>
+          <p:cNvSpPr txBox="1"/>
+          <p:nvPr/>
+        </p:nvSpPr>
+        <p:spPr>
+          <a:xfrm>
+            <a:off x="6437376" y="2075688"/>
+            <a:ext cx="4754880" cy="329184"/>
+          </a:xfrm>
+          <a:prstGeom prst="rect">
+            <a:avLst/>
+          </a:prstGeom>
+          <a:noFill/>
+          <a:ln/>
+        </p:spPr>
+        <p:txBody>
+          <a:bodyPr wrap="square" lIns="0" tIns="0" rIns="0" bIns="0" rtlCol="0" anchor="ctr"/>
+          <a:lstStyle/>
+          <a:p>
+            <a:pPr indent="0" marL="0">
+              <a:buNone/>
+            </a:pPr>
+            <a:r>
+              <a:rPr lang="en-US" sz="1500" b="1" dirty="0">
+                <a:solidFill>
+                  <a:srgbClr val="C2402F"/>
+                </a:solidFill>
+              </a:rPr>
+              <a:t>The players are scripted</a:t>
+            </a:r>
+            <a:endParaRPr lang="en-US" sz="1500" dirty="0"/>
+          </a:p>
+        </p:txBody>
+      </p:sp>
+      <p:sp>
+        <p:nvSpPr>
+          <p:cNvPr id="9" name="Text 7"/>
+          <p:cNvSpPr txBox="1"/>
+          <p:nvPr/>
+        </p:nvSpPr>
+        <p:spPr>
+          <a:xfrm>
+            <a:off x="6437376" y="2441448"/>
+            <a:ext cx="4800600" cy="1051560"/>
+          </a:xfrm>
+          <a:prstGeom prst="rect">
+            <a:avLst/>
+          </a:prstGeom>
+          <a:noFill/>
+          <a:ln/>
+        </p:spPr>
+        <p:txBody>
+          <a:bodyPr wrap="square" lIns="0" tIns="0" rIns="0" bIns="0" rtlCol="0" anchor="ctr"/>
+          <a:lstStyle/>
+          <a:p>
+            <a:pPr indent="0" marL="0">
+              <a:lnSpc>
+                <a:spcPts val="1800"/>
+              </a:lnSpc>
+              <a:buNone/>
+            </a:pPr>
+            <a:r>
+              <a:rPr lang="en-US" sz="1250" dirty="0">
+                <a:solidFill>
+                  <a:srgbClr val="0B0A08"/>
+                </a:solidFill>
+              </a:rPr>
+              <a:t>A Markov model predicting a scripted agent is a weaker claim than one predicting a person. Human traces are the single highest-value next step.</a:t>
+            </a:r>
+            <a:endParaRPr lang="en-US" sz="1250" dirty="0"/>
+          </a:p>
+        </p:txBody>
+      </p:sp>
+      <p:sp>
+        <p:nvSpPr>
+          <p:cNvPr id="10" name="Shape 8"/>
+          <p:cNvSpPr/>
+          <p:nvPr/>
+        </p:nvSpPr>
+        <p:spPr>
+          <a:xfrm>
+            <a:off x="585216" y="3886200"/>
+            <a:ext cx="5303520" cy="1783080"/>
+          </a:xfrm>
+          <a:prstGeom prst="roundRect">
+            <a:avLst>
+              <a:gd name="adj" fmla="val 2051"/>
+            </a:avLst>
+          </a:prstGeom>
+          <a:solidFill>
+            <a:srgbClr val="FFFFFF"/>
+          </a:solidFill>
+          <a:ln w="9525">
+            <a:solidFill>
+              <a:srgbClr val="DED7C6"/>
+            </a:solidFill>
+            <a:prstDash val="solid"/>
+          </a:ln>
+        </p:spPr>
+      </p:sp>
+      <p:sp>
+        <p:nvSpPr>
+          <p:cNvPr id="11" name="Text 9"/>
+          <p:cNvSpPr txBox="1"/>
+          <p:nvPr/>
+        </p:nvSpPr>
+        <p:spPr>
+          <a:xfrm>
+            <a:off x="859536" y="4087368"/>
+            <a:ext cx="4754880" cy="329184"/>
+          </a:xfrm>
+          <a:prstGeom prst="rect">
+            <a:avLst/>
+          </a:prstGeom>
+          <a:noFill/>
+          <a:ln/>
+        </p:spPr>
+        <p:txBody>
+          <a:bodyPr wrap="square" lIns="0" tIns="0" rIns="0" bIns="0" rtlCol="0" anchor="ctr"/>
+          <a:lstStyle/>
+          <a:p>
+            <a:pPr indent="0" marL="0">
+              <a:buNone/>
+            </a:pPr>
+            <a:r>
+              <a:rPr lang="en-US" sz="1500" b="1" dirty="0">
+                <a:solidFill>
+                  <a:srgbClr val="C2402F"/>
+                </a:solidFill>
+              </a:rPr>
+              <a:t>Memory does not transfer</a:t>
+            </a:r>
+            <a:endParaRPr lang="en-US" sz="1500" dirty="0"/>
+          </a:p>
+        </p:txBody>
+      </p:sp>
+      <p:sp>
+        <p:nvSpPr>
+          <p:cNvPr id="12" name="Text 10"/>
+          <p:cNvSpPr txBox="1"/>
+          <p:nvPr/>
+        </p:nvSpPr>
+        <p:spPr>
+          <a:xfrm>
+            <a:off x="859536" y="4453128"/>
+            <a:ext cx="4800600" cy="1051560"/>
+          </a:xfrm>
+          <a:prstGeom prst="rect">
+            <a:avLst/>
+          </a:prstGeom>
+          <a:noFill/>
+          <a:ln/>
+        </p:spPr>
+        <p:txBody>
+          <a:bodyPr wrap="square" lIns="0" tIns="0" rIns="0" bIns="0" rtlCol="0" anchor="ctr"/>
+          <a:lstStyle/>
+          <a:p>
+            <a:pPr indent="0" marL="0">
+              <a:lnSpc>
+                <a:spcPts val="1800"/>
+              </a:lnSpc>
+              <a:buNone/>
+            </a:pPr>
+            <a:r>
+              <a:rPr lang="en-US" sz="1250" dirty="0">
+                <a:solidFill>
+                  <a:srgbClr val="0B0A08"/>
+                </a:solidFill>
+              </a:rPr>
+              <a:t>Retained learning helps in a fixed building and hurts in a regenerated one. The predictor is keyed on room indices, and an index stops meaning the same thing.</a:t>
+            </a:r>
+            <a:endParaRPr lang="en-US" sz="1250" dirty="0"/>
+          </a:p>
+        </p:txBody>
+      </p:sp>
+      <p:sp>
+        <p:nvSpPr>
+          <p:cNvPr id="13" name="Shape 11"/>
+          <p:cNvSpPr/>
+          <p:nvPr/>
+        </p:nvSpPr>
+        <p:spPr>
+          <a:xfrm>
+            <a:off x="6163056" y="3886200"/>
+            <a:ext cx="5303520" cy="1783080"/>
+          </a:xfrm>
+          <a:prstGeom prst="roundRect">
+            <a:avLst>
+              <a:gd name="adj" fmla="val 2051"/>
+            </a:avLst>
+          </a:prstGeom>
+          <a:solidFill>
+            <a:srgbClr val="FFFFFF"/>
+          </a:solidFill>
+          <a:ln w="9525">
+            <a:solidFill>
+              <a:srgbClr val="DED7C6"/>
+            </a:solidFill>
+            <a:prstDash val="solid"/>
+          </a:ln>
+        </p:spPr>
+      </p:sp>
+      <p:sp>
+        <p:nvSpPr>
+          <p:cNvPr id="14" name="Text 12"/>
+          <p:cNvSpPr txBox="1"/>
+          <p:nvPr/>
+        </p:nvSpPr>
+        <p:spPr>
+          <a:xfrm>
+            <a:off x="6437376" y="4087368"/>
+            <a:ext cx="4754880" cy="329184"/>
+          </a:xfrm>
+          <a:prstGeom prst="rect">
+            <a:avLst/>
+          </a:prstGeom>
+          <a:noFill/>
+          <a:ln/>
+        </p:spPr>
+        <p:txBody>
+          <a:bodyPr wrap="square" lIns="0" tIns="0" rIns="0" bIns="0" rtlCol="0" anchor="ctr"/>
+          <a:lstStyle/>
+          <a:p>
+            <a:pPr indent="0" marL="0">
+              <a:buNone/>
+            </a:pPr>
+            <a:r>
+              <a:rPr lang="en-US" sz="1500" b="1" dirty="0">
+                <a:solidFill>
+                  <a:srgbClr val="C2402F"/>
+                </a:solidFill>
+              </a:rPr>
+              <a:t>Dwell is unsolved</a:t>
+            </a:r>
+            <a:endParaRPr lang="en-US" sz="1500" dirty="0"/>
+          </a:p>
+        </p:txBody>
+      </p:sp>
+      <p:sp>
+        <p:nvSpPr>
+          <p:cNvPr id="15" name="Text 13"/>
+          <p:cNvSpPr txBox="1"/>
+          <p:nvPr/>
+        </p:nvSpPr>
+        <p:spPr>
+          <a:xfrm>
+            <a:off x="6437376" y="4453128"/>
+            <a:ext cx="4800600" cy="1051560"/>
+          </a:xfrm>
+          <a:prstGeom prst="rect">
+            <a:avLst/>
+          </a:prstGeom>
+          <a:noFill/>
+          <a:ln/>
+        </p:spPr>
+        <p:txBody>
+          <a:bodyPr wrap="square" lIns="0" tIns="0" rIns="0" bIns="0" rtlCol="0" anchor="ctr"/>
+          <a:lstStyle/>
+          <a:p>
+            <a:pPr indent="0" marL="0">
+              <a:lnSpc>
+                <a:spcPts val="1800"/>
+              </a:lnSpc>
+              <a:buNone/>
+            </a:pPr>
+            <a:r>
+              <a:rPr lang="en-US" sz="1250" dirty="0">
+                <a:solidFill>
+                  <a:srgbClr val="0B0A08"/>
+                </a:solidFill>
+              </a:rPr>
+              <a:t>16.8% recall on the moment the player stops to write, after four failed attempts to improve it.</a:t>
+            </a:r>
+            <a:endParaRPr lang="en-US" sz="1250" dirty="0"/>
+          </a:p>
+        </p:txBody>
+      </p:sp>
+      <p:sp>
+        <p:nvSpPr>
+          <p:cNvPr id="17" name="Text 1"/>
+          <p:cNvSpPr/>
+          <p:nvPr>
+            <p:ph idx="103" hasCustomPrompt="1"/>
+          </p:nvPr>
+        </p:nvSpPr>
+        <p:spPr>
+          <a:xfrm>
+            <a:off x="11247120" y="6327648"/>
+            <a:ext cx="457200" cy="274320"/>
           </a:xfrm>
           <a:prstGeom prst="rect">
             <a:avLst/>
@@ -7531,138 +8099,10 @@
           <a:bodyPr wrap="square" rtlCol="0"/>
           <a:lstStyle/>
           <a:p>
-            <a:pPr algn="l" indent="0" marL="0">
-              <a:lnSpc>
-                <a:spcPts val="2500"/>
-              </a:lnSpc>
-              <a:buNone/>
-            </a:pPr>
-            <a:r>
-              <a:rPr lang="en-US" sz="1500" b="1" dirty="0">
-                <a:solidFill>
-                  <a:srgbClr val="FBF9F4"/>
-                </a:solidFill>
-              </a:rPr>
-              <a:t>A horror antagonist that models the individual player, and a measurement that says how well.</a:t>
-            </a:r>
-            <a:endParaRPr lang="en-US" sz="1500" dirty="0"/>
-          </a:p>
-          <a:p>
-            <a:pPr algn="l" indent="0" marL="0">
-              <a:lnSpc>
-                <a:spcPts val="2500"/>
-              </a:lnSpc>
-              <a:buNone/>
-            </a:pPr>
-            <a:endParaRPr lang="en-US" sz="1500" dirty="0"/>
-          </a:p>
-          <a:p>
-            <a:pPr algn="l" indent="0" marL="0">
-              <a:lnSpc>
-                <a:spcPts val="2500"/>
-              </a:lnSpc>
-              <a:buNone/>
-            </a:pPr>
-            <a:r>
-              <a:rPr lang="en-US" sz="1500" dirty="0">
-                <a:solidFill>
-                  <a:srgbClr val="FBF9F4"/>
-                </a:solidFill>
-              </a:rPr>
-              <a:t>It predicts the next room 83.6% of the time against a habitual player, and 26.7% against one with no habits — which is exactly what having no model scores. The gain is learned behaviour, not leakage. Against an oracle that can see the player's internal state, it reaches 97% of the achievable signal from behaviour alone.</a:t>
-            </a:r>
-            <a:endParaRPr lang="en-US" sz="1500" dirty="0"/>
-          </a:p>
-          <a:p>
-            <a:pPr algn="l" indent="0" marL="0">
-              <a:lnSpc>
-                <a:spcPts val="2500"/>
-              </a:lnSpc>
-              <a:buNone/>
-            </a:pPr>
-            <a:endParaRPr lang="en-US" sz="1500" dirty="0"/>
-          </a:p>
-          <a:p>
-            <a:pPr algn="l" indent="0" marL="0">
-              <a:lnSpc>
-                <a:spcPts val="2500"/>
-              </a:lnSpc>
-              <a:buNone/>
-            </a:pPr>
-            <a:r>
-              <a:rPr lang="en-US" sz="1500" b="1" dirty="0">
-                <a:solidFill>
-                  <a:srgbClr val="FFB545"/>
-                </a:solidFill>
-              </a:rPr>
-              <a:t>It gets better at catching a returning player, and we now know the one condition where it does not.</a:t>
-            </a:r>
-            <a:endParaRPr lang="en-US" sz="1500" dirty="0"/>
-          </a:p>
-          <a:p>
-            <a:pPr algn="l" indent="0" marL="0">
-              <a:lnSpc>
-                <a:spcPts val="2500"/>
-              </a:lnSpc>
-              <a:buNone/>
-            </a:pPr>
-            <a:endParaRPr lang="en-US" sz="1500" dirty="0"/>
-          </a:p>
-          <a:p>
-            <a:pPr algn="l" indent="0" marL="0">
-              <a:lnSpc>
-                <a:spcPts val="2500"/>
-              </a:lnSpc>
-              <a:buNone/>
-            </a:pPr>
-            <a:r>
-              <a:rPr lang="en-US" sz="1500" dirty="0">
-                <a:solidFill>
-                  <a:srgbClr val="7A7059"/>
-                </a:solidFill>
-              </a:rPr>
-              <a:t>Next: human playtest traces in place of scripted players, and a predictor re-keyed on features that survive a rewired building.</a:t>
-            </a:r>
-            <a:endParaRPr lang="en-US" sz="1500" dirty="0"/>
-          </a:p>
-        </p:txBody>
-      </p:sp>
-      <p:sp>
-        <p:nvSpPr>
-          <p:cNvPr id="4" name="Text 2"/>
-          <p:cNvSpPr txBox="1"/>
-          <p:nvPr/>
-        </p:nvSpPr>
-        <p:spPr>
-          <a:xfrm>
-            <a:off x="868680" y="6236208"/>
-            <a:ext cx="6400800" cy="320040"/>
-          </a:xfrm>
-          <a:prstGeom prst="rect">
-            <a:avLst/>
-          </a:prstGeom>
-          <a:noFill/>
-          <a:ln/>
-        </p:spPr>
-        <p:txBody>
-          <a:bodyPr wrap="square" lIns="0" tIns="0" rIns="0" bIns="0" rtlCol="0" anchor="ctr"/>
-          <a:lstStyle/>
-          <a:p>
-            <a:pPr indent="0" marL="0">
-              <a:buNone/>
-            </a:pPr>
-            <a:r>
-              <a:rPr lang="en-US" sz="1250" dirty="0">
-                <a:solidFill>
-                  <a:srgbClr val="7A7059"/>
-                </a:solidFill>
-                <a:latin typeface="Courier New" pitchFamily="34" charset="0"/>
-                <a:ea typeface="Courier New" pitchFamily="34" charset="-122"/>
-                <a:cs typeface="Courier New" pitchFamily="34" charset="-120"/>
-              </a:rPr>
-              <a:t>github.com/Sh1v4mKum4r/parity</a:t>
-            </a:r>
-            <a:endParaRPr lang="en-US" sz="1250" dirty="0"/>
+            <a:pPr algn="r" indent="0" marL="0">
+              <a:buNone/>
+            </a:pPr>
+            <a:endParaRPr lang="en-US" sz="950" dirty="0"/>
           </a:p>
         </p:txBody>
       </p:sp>
@@ -7808,6 +8248,230 @@
               <a:t>Game AI has optimised for competence. Adaptation to the individual player is the less-solved half.</a:t>
             </a:r>
             <a:endParaRPr lang="en-US" sz="1500" dirty="0"/>
+          </a:p>
+        </p:txBody>
+      </p:sp>
+    </p:spTree>
+  </p:cSld>
+  <p:clrMapOvr>
+    <a:masterClrMapping/>
+  </p:clrMapOvr>
+</p:sld>
+</file>
+
+<file path=ppt/slides/slide20.xml><?xml version="1.0" encoding="utf-8"?>
+<p:sld xmlns:a="http://schemas.openxmlformats.org/drawingml/2006/main" xmlns:r="http://schemas.openxmlformats.org/officeDocument/2006/relationships" xmlns:p="http://schemas.openxmlformats.org/presentationml/2006/main">
+  <p:cSld name="Slide 20">
+    <p:spTree>
+      <p:nvGrpSpPr>
+        <p:cNvPr id="1" name=""/>
+        <p:cNvGrpSpPr/>
+        <p:nvPr/>
+      </p:nvGrpSpPr>
+      <p:grpSpPr>
+        <a:xfrm>
+          <a:off x="0" y="0"/>
+          <a:ext cx="0" cy="0"/>
+          <a:chOff x="0" y="0"/>
+          <a:chExt cx="0" cy="0"/>
+        </a:xfrm>
+      </p:grpSpPr>
+      <p:sp>
+        <p:nvSpPr>
+          <p:cNvPr id="2" name="Text 0"/>
+          <p:cNvSpPr/>
+          <p:nvPr>
+            <p:ph idx="100" type="title" hasCustomPrompt="1"/>
+          </p:nvPr>
+        </p:nvSpPr>
+        <p:spPr>
+          <a:xfrm>
+            <a:off x="822960" y="1371600"/>
+            <a:ext cx="10515600" cy="914400"/>
+          </a:xfrm>
+          <a:prstGeom prst="rect">
+            <a:avLst/>
+          </a:prstGeom>
+          <a:noFill/>
+          <a:ln/>
+        </p:spPr>
+        <p:txBody>
+          <a:bodyPr wrap="square" rtlCol="0"/>
+          <a:lstStyle/>
+          <a:p>
+            <a:pPr algn="l" indent="0" marL="0">
+              <a:buNone/>
+            </a:pPr>
+            <a:r>
+              <a:rPr lang="en-US" sz="3800" b="1" dirty="0">
+                <a:solidFill>
+                  <a:srgbClr val="FFB545"/>
+                </a:solidFill>
+                <a:latin typeface="Cambria" pitchFamily="34" charset="0"/>
+                <a:ea typeface="Cambria" pitchFamily="34" charset="-122"/>
+                <a:cs typeface="Cambria" pitchFamily="34" charset="-120"/>
+              </a:rPr>
+              <a:t>Where it stands</a:t>
+            </a:r>
+            <a:endParaRPr lang="en-US" sz="3800" dirty="0"/>
+          </a:p>
+        </p:txBody>
+      </p:sp>
+      <p:sp>
+        <p:nvSpPr>
+          <p:cNvPr id="3" name="Text 0"/>
+          <p:cNvSpPr/>
+          <p:nvPr>
+            <p:ph idx="101" type="body" hasCustomPrompt="1"/>
+          </p:nvPr>
+        </p:nvSpPr>
+        <p:spPr>
+          <a:xfrm>
+            <a:off x="868680" y="2212848"/>
+            <a:ext cx="10332720" cy="3611880"/>
+          </a:xfrm>
+          <a:prstGeom prst="rect">
+            <a:avLst/>
+          </a:prstGeom>
+          <a:noFill/>
+          <a:ln/>
+        </p:spPr>
+        <p:txBody>
+          <a:bodyPr wrap="square" rtlCol="0"/>
+          <a:lstStyle/>
+          <a:p>
+            <a:pPr algn="l" indent="0" marL="0">
+              <a:lnSpc>
+                <a:spcPts val="2500"/>
+              </a:lnSpc>
+              <a:buNone/>
+            </a:pPr>
+            <a:r>
+              <a:rPr lang="en-US" sz="1500" b="1" dirty="0">
+                <a:solidFill>
+                  <a:srgbClr val="FBF9F4"/>
+                </a:solidFill>
+              </a:rPr>
+              <a:t>A horror antagonist that models the individual player, and a measurement that says how well.</a:t>
+            </a:r>
+            <a:endParaRPr lang="en-US" sz="1500" dirty="0"/>
+          </a:p>
+          <a:p>
+            <a:pPr algn="l" indent="0" marL="0">
+              <a:lnSpc>
+                <a:spcPts val="2500"/>
+              </a:lnSpc>
+              <a:buNone/>
+            </a:pPr>
+            <a:endParaRPr lang="en-US" sz="1500" dirty="0"/>
+          </a:p>
+          <a:p>
+            <a:pPr algn="l" indent="0" marL="0">
+              <a:lnSpc>
+                <a:spcPts val="2500"/>
+              </a:lnSpc>
+              <a:buNone/>
+            </a:pPr>
+            <a:r>
+              <a:rPr lang="en-US" sz="1500" dirty="0">
+                <a:solidFill>
+                  <a:srgbClr val="FBF9F4"/>
+                </a:solidFill>
+              </a:rPr>
+              <a:t>It predicts the next room 83.6% of the time against a habitual player, and 26.7% against one with no habits — which is exactly what having no model scores. The gain is learned behaviour, not leakage. Against an oracle that can see the player's internal state, it reaches 97% of the achievable signal from behaviour alone.</a:t>
+            </a:r>
+            <a:endParaRPr lang="en-US" sz="1500" dirty="0"/>
+          </a:p>
+          <a:p>
+            <a:pPr algn="l" indent="0" marL="0">
+              <a:lnSpc>
+                <a:spcPts val="2500"/>
+              </a:lnSpc>
+              <a:buNone/>
+            </a:pPr>
+            <a:endParaRPr lang="en-US" sz="1500" dirty="0"/>
+          </a:p>
+          <a:p>
+            <a:pPr algn="l" indent="0" marL="0">
+              <a:lnSpc>
+                <a:spcPts val="2500"/>
+              </a:lnSpc>
+              <a:buNone/>
+            </a:pPr>
+            <a:r>
+              <a:rPr lang="en-US" sz="1500" b="1" dirty="0">
+                <a:solidFill>
+                  <a:srgbClr val="FFB545"/>
+                </a:solidFill>
+              </a:rPr>
+              <a:t>It gets better at catching a returning player, and we now know the one condition where it does not.</a:t>
+            </a:r>
+            <a:endParaRPr lang="en-US" sz="1500" dirty="0"/>
+          </a:p>
+          <a:p>
+            <a:pPr algn="l" indent="0" marL="0">
+              <a:lnSpc>
+                <a:spcPts val="2500"/>
+              </a:lnSpc>
+              <a:buNone/>
+            </a:pPr>
+            <a:endParaRPr lang="en-US" sz="1500" dirty="0"/>
+          </a:p>
+          <a:p>
+            <a:pPr algn="l" indent="0" marL="0">
+              <a:lnSpc>
+                <a:spcPts val="2500"/>
+              </a:lnSpc>
+              <a:buNone/>
+            </a:pPr>
+            <a:r>
+              <a:rPr lang="en-US" sz="1500" dirty="0">
+                <a:solidFill>
+                  <a:srgbClr val="7A7059"/>
+                </a:solidFill>
+              </a:rPr>
+              <a:t>Next: human playtest traces in place of scripted players, and a predictor re-keyed on features that survive a rewired building.</a:t>
+            </a:r>
+            <a:endParaRPr lang="en-US" sz="1500" dirty="0"/>
+          </a:p>
+        </p:txBody>
+      </p:sp>
+      <p:sp>
+        <p:nvSpPr>
+          <p:cNvPr id="4" name="Text 2"/>
+          <p:cNvSpPr txBox="1"/>
+          <p:nvPr/>
+        </p:nvSpPr>
+        <p:spPr>
+          <a:xfrm>
+            <a:off x="868680" y="6236208"/>
+            <a:ext cx="6400800" cy="320040"/>
+          </a:xfrm>
+          <a:prstGeom prst="rect">
+            <a:avLst/>
+          </a:prstGeom>
+          <a:noFill/>
+          <a:ln/>
+        </p:spPr>
+        <p:txBody>
+          <a:bodyPr wrap="square" lIns="0" tIns="0" rIns="0" bIns="0" rtlCol="0" anchor="ctr"/>
+          <a:lstStyle/>
+          <a:p>
+            <a:pPr indent="0" marL="0">
+              <a:buNone/>
+            </a:pPr>
+            <a:r>
+              <a:rPr lang="en-US" sz="1250" dirty="0">
+                <a:solidFill>
+                  <a:srgbClr val="7A7059"/>
+                </a:solidFill>
+                <a:latin typeface="Courier New" pitchFamily="34" charset="0"/>
+                <a:ea typeface="Courier New" pitchFamily="34" charset="-122"/>
+                <a:cs typeface="Courier New" pitchFamily="34" charset="-120"/>
+              </a:rPr>
+              <a:t>github.com/Sh1v4mKum4r/parity</a:t>
+            </a:r>
+            <a:endParaRPr lang="en-US" sz="1250" dirty="0"/>
           </a:p>
         </p:txBody>
       </p:sp>
